--- a/ゲーム科1年/00_前期/ゲームプログラミングⅢ/05_オリジナルゲーム制作.pptx
+++ b/ゲーム科1年/00_前期/ゲームプログラミングⅢ/05_オリジナルゲーム制作.pptx
@@ -263,7 +263,7 @@
           <a:p>
             <a:fld id="{E9CC885B-4903-4D54-9A93-00025F12DED9}" type="datetimeFigureOut">
               <a:rPr kumimoji="1" lang="ja-JP" altLang="en-US" smtClean="0"/>
-              <a:t>2026/1/29</a:t>
+              <a:t>2026/5/13</a:t>
             </a:fld>
             <a:endParaRPr kumimoji="1" lang="ja-JP" altLang="en-US"/>
           </a:p>
@@ -493,7 +493,7 @@
           <a:p>
             <a:fld id="{E9CC885B-4903-4D54-9A93-00025F12DED9}" type="datetimeFigureOut">
               <a:rPr kumimoji="1" lang="ja-JP" altLang="en-US" smtClean="0"/>
-              <a:t>2026/1/29</a:t>
+              <a:t>2026/5/13</a:t>
             </a:fld>
             <a:endParaRPr kumimoji="1" lang="ja-JP" altLang="en-US"/>
           </a:p>
@@ -733,7 +733,7 @@
           <a:p>
             <a:fld id="{E9CC885B-4903-4D54-9A93-00025F12DED9}" type="datetimeFigureOut">
               <a:rPr kumimoji="1" lang="ja-JP" altLang="en-US" smtClean="0"/>
-              <a:t>2026/1/29</a:t>
+              <a:t>2026/5/13</a:t>
             </a:fld>
             <a:endParaRPr kumimoji="1" lang="ja-JP" altLang="en-US"/>
           </a:p>
@@ -963,7 +963,7 @@
           <a:p>
             <a:fld id="{E9CC885B-4903-4D54-9A93-00025F12DED9}" type="datetimeFigureOut">
               <a:rPr kumimoji="1" lang="ja-JP" altLang="en-US" smtClean="0"/>
-              <a:t>2026/1/29</a:t>
+              <a:t>2026/5/13</a:t>
             </a:fld>
             <a:endParaRPr kumimoji="1" lang="ja-JP" altLang="en-US"/>
           </a:p>
@@ -1238,7 +1238,7 @@
           <a:p>
             <a:fld id="{E9CC885B-4903-4D54-9A93-00025F12DED9}" type="datetimeFigureOut">
               <a:rPr kumimoji="1" lang="ja-JP" altLang="en-US" smtClean="0"/>
-              <a:t>2026/1/29</a:t>
+              <a:t>2026/5/13</a:t>
             </a:fld>
             <a:endParaRPr kumimoji="1" lang="ja-JP" altLang="en-US"/>
           </a:p>
@@ -1567,7 +1567,7 @@
           <a:p>
             <a:fld id="{E9CC885B-4903-4D54-9A93-00025F12DED9}" type="datetimeFigureOut">
               <a:rPr kumimoji="1" lang="ja-JP" altLang="en-US" smtClean="0"/>
-              <a:t>2026/1/29</a:t>
+              <a:t>2026/5/13</a:t>
             </a:fld>
             <a:endParaRPr kumimoji="1" lang="ja-JP" altLang="en-US"/>
           </a:p>
@@ -2043,7 +2043,7 @@
           <a:p>
             <a:fld id="{E9CC885B-4903-4D54-9A93-00025F12DED9}" type="datetimeFigureOut">
               <a:rPr kumimoji="1" lang="ja-JP" altLang="en-US" smtClean="0"/>
-              <a:t>2026/1/29</a:t>
+              <a:t>2026/5/13</a:t>
             </a:fld>
             <a:endParaRPr kumimoji="1" lang="ja-JP" altLang="en-US"/>
           </a:p>
@@ -2184,7 +2184,7 @@
           <a:p>
             <a:fld id="{E9CC885B-4903-4D54-9A93-00025F12DED9}" type="datetimeFigureOut">
               <a:rPr kumimoji="1" lang="ja-JP" altLang="en-US" smtClean="0"/>
-              <a:t>2026/1/29</a:t>
+              <a:t>2026/5/13</a:t>
             </a:fld>
             <a:endParaRPr kumimoji="1" lang="ja-JP" altLang="en-US"/>
           </a:p>
@@ -2297,7 +2297,7 @@
           <a:p>
             <a:fld id="{E9CC885B-4903-4D54-9A93-00025F12DED9}" type="datetimeFigureOut">
               <a:rPr kumimoji="1" lang="ja-JP" altLang="en-US" smtClean="0"/>
-              <a:t>2026/1/29</a:t>
+              <a:t>2026/5/13</a:t>
             </a:fld>
             <a:endParaRPr kumimoji="1" lang="ja-JP" altLang="en-US"/>
           </a:p>
@@ -2640,7 +2640,7 @@
           <a:p>
             <a:fld id="{E9CC885B-4903-4D54-9A93-00025F12DED9}" type="datetimeFigureOut">
               <a:rPr kumimoji="1" lang="ja-JP" altLang="en-US" smtClean="0"/>
-              <a:t>2026/1/29</a:t>
+              <a:t>2026/5/13</a:t>
             </a:fld>
             <a:endParaRPr kumimoji="1" lang="ja-JP" altLang="en-US"/>
           </a:p>
@@ -2928,7 +2928,7 @@
           <a:p>
             <a:fld id="{E9CC885B-4903-4D54-9A93-00025F12DED9}" type="datetimeFigureOut">
               <a:rPr kumimoji="1" lang="ja-JP" altLang="en-US" smtClean="0"/>
-              <a:t>2026/1/29</a:t>
+              <a:t>2026/5/13</a:t>
             </a:fld>
             <a:endParaRPr kumimoji="1" lang="ja-JP" altLang="en-US"/>
           </a:p>
@@ -3201,7 +3201,7 @@
           <a:p>
             <a:fld id="{E9CC885B-4903-4D54-9A93-00025F12DED9}" type="datetimeFigureOut">
               <a:rPr kumimoji="1" lang="ja-JP" altLang="en-US" smtClean="0"/>
-              <a:t>2026/1/29</a:t>
+              <a:t>2026/5/13</a:t>
             </a:fld>
             <a:endParaRPr kumimoji="1" lang="ja-JP" altLang="en-US"/>
           </a:p>
@@ -4227,7 +4227,7 @@
             </a:r>
             <a:r>
               <a:rPr kumimoji="1" lang="ja-JP" altLang="en-US" sz="2400" dirty="0"/>
-              <a:t>おおよそですが、締め切りの１か月前に使用の全実装が現実的かと思います。</a:t>
+              <a:t>おおよそですが、締め切りの１か月前に全実装が現実的かと思います。</a:t>
             </a:r>
             <a:endParaRPr kumimoji="1" lang="en-US" altLang="ja-JP" sz="2400" dirty="0"/>
           </a:p>
